--- a/docs/KLTN - Nguyễn Hoàng Nhân - DA21TTA - 110121071.pptx
+++ b/docs/KLTN - Nguyễn Hoàng Nhân - DA21TTA - 110121071.pptx
@@ -10797,7 +10797,7 @@
         <p:spPr>
           <a:xfrm>
             <a:off x="167148" y="2810160"/>
-            <a:ext cx="11857704" cy="1391728"/>
+            <a:ext cx="11857704" cy="1383199"/>
           </a:xfrm>
           <a:prstGeom prst="rect">
             <a:avLst/>
@@ -10822,7 +10822,7 @@
               </a:spcAft>
             </a:pPr>
             <a:r>
-              <a:rPr lang="en-US" sz="3000" b="1">
+              <a:rPr lang="en-US" sz="3000" b="1" dirty="0">
                 <a:solidFill>
                   <a:srgbClr val="000000"/>
                 </a:solidFill>
@@ -10831,7 +10831,7 @@
                 <a:ea typeface="Tahoma" panose="020B0604030504040204" pitchFamily="34" charset="0"/>
                 <a:cs typeface="Tahoma" panose="020B0604030504040204" pitchFamily="34" charset="0"/>
               </a:rPr>
-              <a:t>XÂY DỰNG WEBSITE BÁN ĐIỆN THOẠI</a:t>
+              <a:t>XÂY DỰNG WEBSITE BÁN </a:t>
             </a:r>
           </a:p>
           <a:p>
@@ -10847,17 +10847,29 @@
               </a:spcAft>
             </a:pPr>
             <a:r>
-              <a:rPr lang="en-US" sz="3000" b="1">
+              <a:rPr lang="en-US" sz="3000" b="1" dirty="0">
                 <a:solidFill>
                   <a:srgbClr val="000000"/>
                 </a:solidFill>
-                <a:latin typeface="Tahoma" panose="020B0604030504040204" pitchFamily="34" charset="0"/>
-                <a:ea typeface="Tahoma" panose="020B0604030504040204" pitchFamily="34" charset="0"/>
-                <a:cs typeface="Tahoma" panose="020B0604030504040204" pitchFamily="34" charset="0"/>
-              </a:rPr>
-              <a:t>BẰNG EXPRESS</a:t>
-            </a:r>
-            <a:endParaRPr lang="en-US" sz="3000">
+                <a:effectLst/>
+                <a:latin typeface="Tahoma" panose="020B0604030504040204" pitchFamily="34" charset="0"/>
+                <a:ea typeface="Tahoma" panose="020B0604030504040204" pitchFamily="34" charset="0"/>
+                <a:cs typeface="Tahoma" panose="020B0604030504040204" pitchFamily="34" charset="0"/>
+              </a:rPr>
+              <a:t>ĐIỆN THOẠI </a:t>
+            </a:r>
+            <a:r>
+              <a:rPr lang="en-US" sz="3000" b="1" dirty="0">
+                <a:solidFill>
+                  <a:srgbClr val="000000"/>
+                </a:solidFill>
+                <a:latin typeface="Tahoma" panose="020B0604030504040204" pitchFamily="34" charset="0"/>
+                <a:ea typeface="Tahoma" panose="020B0604030504040204" pitchFamily="34" charset="0"/>
+                <a:cs typeface="Tahoma" panose="020B0604030504040204" pitchFamily="34" charset="0"/>
+              </a:rPr>
+              <a:t>DI ĐỘNG</a:t>
+            </a:r>
+            <a:endParaRPr lang="en-US" sz="3000" dirty="0">
               <a:effectLst/>
               <a:latin typeface="Tahoma" panose="020B0604030504040204" pitchFamily="34" charset="0"/>
               <a:ea typeface="Tahoma" panose="020B0604030504040204" pitchFamily="34" charset="0"/>
